--- a/materials/presentation_drafts/presentation_高橋朋子.pptx
+++ b/materials/presentation_drafts/presentation_高橋朋子.pptx
@@ -3887,7 +3887,7 @@
             <a:avLst/>
           </a:prstGeom>
           <a:solidFill>
-            <a:srgbClr val="14A0B4"/>
+            <a:srgbClr val="E60013"/>
           </a:solidFill>
           <a:ln/>
         </p:spPr>
@@ -4583,30 +4583,6 @@
               </a:p>
             </p:txBody>
           </p:sp>
-          <p:pic>
-            <p:nvPicPr>
-              <p:cNvPr id="9" name="Image 0" descr="preencoded.png"/>
-              <p:cNvPicPr>
-                <a:picLocks/>
-              </p:cNvPicPr>
-              <p:nvPr/>
-            </p:nvPicPr>
-            <p:blipFill>
-              <a:blip r:embed="rId3"/>
-              <a:stretch>
-                <a:fillRect/>
-              </a:stretch>
-            </p:blipFill>
-            <p:spPr>
-              <a:xfrm>
-                <a:off x="10624097" y="1673499"/>
-                <a:ext cx="1257587" cy="760826"/>
-              </a:xfrm>
-              <a:prstGeom prst="rect">
-                <a:avLst/>
-              </a:prstGeom>
-            </p:spPr>
-          </p:pic>
           <p:sp>
             <p:nvSpPr>
               <p:cNvPr id="10" name="Text 16"/>
@@ -4956,6 +4932,230 @@
           </p:txBody>
         </p:sp>
       </p:grpSp>
+      <p:sp>
+        <p:nvSpPr>
+          <p:cNvPr id="5" name="楕円 4">
+            <a:extLst>
+              <a:ext uri="{FF2B5EF4-FFF2-40B4-BE49-F238E27FC236}">
+                <a16:creationId xmlns:a16="http://schemas.microsoft.com/office/drawing/2014/main" id="{148B7858-99E0-B3C1-BF8B-E3BF912840DA}"/>
+              </a:ext>
+            </a:extLst>
+          </p:cNvPr>
+          <p:cNvSpPr/>
+          <p:nvPr/>
+        </p:nvSpPr>
+        <p:spPr>
+          <a:xfrm>
+            <a:off x="10624096" y="2385293"/>
+            <a:ext cx="720000" cy="720000"/>
+          </a:xfrm>
+          <a:prstGeom prst="ellipse">
+            <a:avLst/>
+          </a:prstGeom>
+          <a:solidFill>
+            <a:srgbClr val="0064A0"/>
+          </a:solidFill>
+          <a:ln>
+            <a:noFill/>
+          </a:ln>
+        </p:spPr>
+        <p:style>
+          <a:lnRef idx="2">
+            <a:schemeClr val="accent1">
+              <a:shade val="15000"/>
+            </a:schemeClr>
+          </a:lnRef>
+          <a:fillRef idx="1">
+            <a:schemeClr val="accent1"/>
+          </a:fillRef>
+          <a:effectRef idx="0">
+            <a:schemeClr val="accent1"/>
+          </a:effectRef>
+          <a:fontRef idx="minor">
+            <a:schemeClr val="lt1"/>
+          </a:fontRef>
+        </p:style>
+        <p:txBody>
+          <a:bodyPr rtlCol="0" anchor="ctr"/>
+          <a:lstStyle/>
+          <a:p>
+            <a:pPr algn="ctr"/>
+            <a:endParaRPr kumimoji="1" lang="ja-JP" altLang="en-US">
+              <a:solidFill>
+                <a:srgbClr val="E5A330"/>
+              </a:solidFill>
+            </a:endParaRPr>
+          </a:p>
+        </p:txBody>
+      </p:sp>
+      <p:sp>
+        <p:nvSpPr>
+          <p:cNvPr id="17" name="楕円 16">
+            <a:extLst>
+              <a:ext uri="{FF2B5EF4-FFF2-40B4-BE49-F238E27FC236}">
+                <a16:creationId xmlns:a16="http://schemas.microsoft.com/office/drawing/2014/main" id="{DF4CE6C0-C361-0427-C65A-03AFF5E5A110}"/>
+              </a:ext>
+            </a:extLst>
+          </p:cNvPr>
+          <p:cNvSpPr/>
+          <p:nvPr/>
+        </p:nvSpPr>
+        <p:spPr>
+          <a:xfrm>
+            <a:off x="10624096" y="3039962"/>
+            <a:ext cx="720000" cy="720000"/>
+          </a:xfrm>
+          <a:prstGeom prst="ellipse">
+            <a:avLst/>
+          </a:prstGeom>
+          <a:solidFill>
+            <a:srgbClr val="002E6E"/>
+          </a:solidFill>
+          <a:ln>
+            <a:noFill/>
+          </a:ln>
+        </p:spPr>
+        <p:style>
+          <a:lnRef idx="2">
+            <a:schemeClr val="accent1">
+              <a:shade val="15000"/>
+            </a:schemeClr>
+          </a:lnRef>
+          <a:fillRef idx="1">
+            <a:schemeClr val="accent1"/>
+          </a:fillRef>
+          <a:effectRef idx="0">
+            <a:schemeClr val="accent1"/>
+          </a:effectRef>
+          <a:fontRef idx="minor">
+            <a:schemeClr val="lt1"/>
+          </a:fontRef>
+        </p:style>
+        <p:txBody>
+          <a:bodyPr rtlCol="0" anchor="ctr"/>
+          <a:lstStyle/>
+          <a:p>
+            <a:pPr algn="ctr"/>
+            <a:endParaRPr kumimoji="1" lang="ja-JP" altLang="en-US">
+              <a:solidFill>
+                <a:srgbClr val="E5A330"/>
+              </a:solidFill>
+            </a:endParaRPr>
+          </a:p>
+        </p:txBody>
+      </p:sp>
+      <p:sp>
+        <p:nvSpPr>
+          <p:cNvPr id="18" name="楕円 17">
+            <a:extLst>
+              <a:ext uri="{FF2B5EF4-FFF2-40B4-BE49-F238E27FC236}">
+                <a16:creationId xmlns:a16="http://schemas.microsoft.com/office/drawing/2014/main" id="{96DCB5B1-0C58-27B7-9E47-F81120FCE586}"/>
+              </a:ext>
+            </a:extLst>
+          </p:cNvPr>
+          <p:cNvSpPr/>
+          <p:nvPr/>
+        </p:nvSpPr>
+        <p:spPr>
+          <a:xfrm>
+            <a:off x="10624096" y="3694632"/>
+            <a:ext cx="720000" cy="720000"/>
+          </a:xfrm>
+          <a:prstGeom prst="ellipse">
+            <a:avLst/>
+          </a:prstGeom>
+          <a:solidFill>
+            <a:srgbClr val="14A0B4"/>
+          </a:solidFill>
+          <a:ln>
+            <a:noFill/>
+          </a:ln>
+        </p:spPr>
+        <p:style>
+          <a:lnRef idx="2">
+            <a:schemeClr val="accent1">
+              <a:shade val="15000"/>
+            </a:schemeClr>
+          </a:lnRef>
+          <a:fillRef idx="1">
+            <a:schemeClr val="accent1"/>
+          </a:fillRef>
+          <a:effectRef idx="0">
+            <a:schemeClr val="accent1"/>
+          </a:effectRef>
+          <a:fontRef idx="minor">
+            <a:schemeClr val="lt1"/>
+          </a:fontRef>
+        </p:style>
+        <p:txBody>
+          <a:bodyPr rtlCol="0" anchor="ctr"/>
+          <a:lstStyle/>
+          <a:p>
+            <a:pPr algn="ctr"/>
+            <a:endParaRPr kumimoji="1" lang="ja-JP" altLang="en-US">
+              <a:solidFill>
+                <a:srgbClr val="E5A330"/>
+              </a:solidFill>
+            </a:endParaRPr>
+          </a:p>
+        </p:txBody>
+      </p:sp>
+      <p:sp>
+        <p:nvSpPr>
+          <p:cNvPr id="4" name="楕円 3">
+            <a:extLst>
+              <a:ext uri="{FF2B5EF4-FFF2-40B4-BE49-F238E27FC236}">
+                <a16:creationId xmlns:a16="http://schemas.microsoft.com/office/drawing/2014/main" id="{5DD715EF-00BF-8C60-EF9A-EC0BEB398A0D}"/>
+              </a:ext>
+            </a:extLst>
+          </p:cNvPr>
+          <p:cNvSpPr/>
+          <p:nvPr/>
+        </p:nvSpPr>
+        <p:spPr>
+          <a:xfrm>
+            <a:off x="10624096" y="1585020"/>
+            <a:ext cx="720000" cy="720000"/>
+          </a:xfrm>
+          <a:prstGeom prst="ellipse">
+            <a:avLst/>
+          </a:prstGeom>
+          <a:solidFill>
+            <a:srgbClr val="E5A330"/>
+          </a:solidFill>
+          <a:ln>
+            <a:noFill/>
+          </a:ln>
+        </p:spPr>
+        <p:style>
+          <a:lnRef idx="2">
+            <a:schemeClr val="accent1">
+              <a:shade val="15000"/>
+            </a:schemeClr>
+          </a:lnRef>
+          <a:fillRef idx="1">
+            <a:schemeClr val="accent1"/>
+          </a:fillRef>
+          <a:effectRef idx="0">
+            <a:schemeClr val="accent1"/>
+          </a:effectRef>
+          <a:fontRef idx="minor">
+            <a:schemeClr val="lt1"/>
+          </a:fontRef>
+        </p:style>
+        <p:txBody>
+          <a:bodyPr rtlCol="0" anchor="ctr"/>
+          <a:lstStyle/>
+          <a:p>
+            <a:pPr algn="ctr"/>
+            <a:endParaRPr kumimoji="1" lang="ja-JP" altLang="en-US">
+              <a:solidFill>
+                <a:srgbClr val="E5A330"/>
+              </a:solidFill>
+            </a:endParaRPr>
+          </a:p>
+        </p:txBody>
+      </p:sp>
     </p:spTree>
   </p:cSld>
   <p:clrMapOvr>
@@ -6291,7 +6491,7 @@
             </a:avLst>
           </a:prstGeom>
           <a:solidFill>
-            <a:srgbClr val="C00000"/>
+            <a:srgbClr val="E60013"/>
           </a:solidFill>
           <a:ln/>
         </p:spPr>
@@ -9697,10 +9897,10 @@
       </p:sp>
       <p:sp>
         <p:nvSpPr>
-          <p:cNvPr id="39" name="Text 1">
+          <p:cNvPr id="5" name="Text 1">
             <a:extLst>
               <a:ext uri="{FF2B5EF4-FFF2-40B4-BE49-F238E27FC236}">
-                <a16:creationId xmlns:a16="http://schemas.microsoft.com/office/drawing/2014/main" id="{AC8117B8-21C1-D741-5E49-483ADE3D826B}"/>
+                <a16:creationId xmlns:a16="http://schemas.microsoft.com/office/drawing/2014/main" id="{0374B01B-DD78-B64C-ED5F-2D6BD271259E}"/>
               </a:ext>
             </a:extLst>
           </p:cNvPr>
@@ -9718,7 +9918,7 @@
             </a:avLst>
           </a:prstGeom>
           <a:solidFill>
-            <a:srgbClr val="C00000"/>
+            <a:srgbClr val="E60013"/>
           </a:solidFill>
           <a:ln/>
         </p:spPr>
@@ -9732,7 +9932,7 @@
               <a:buNone/>
             </a:pPr>
             <a:r>
-              <a:rPr lang="ja-JP" altLang="en-US" sz="3200" b="1" dirty="0">
+              <a:rPr lang="ja-JP" altLang="en-US" sz="2400" b="1" dirty="0">
                 <a:solidFill>
                   <a:schemeClr val="bg1"/>
                 </a:solidFill>
@@ -9741,7 +9941,7 @@
               </a:rPr>
               <a:t>課題１　工夫</a:t>
             </a:r>
-            <a:endParaRPr lang="en-US" sz="3200" b="1" dirty="0">
+            <a:endParaRPr lang="en-US" sz="2400" b="1" dirty="0">
               <a:solidFill>
                 <a:schemeClr val="bg1"/>
               </a:solidFill>
@@ -11652,7 +11852,7 @@
             </a:avLst>
           </a:prstGeom>
           <a:solidFill>
-            <a:srgbClr val="C00000"/>
+            <a:srgbClr val="E60013"/>
           </a:solidFill>
           <a:ln/>
         </p:spPr>
@@ -12349,7 +12549,29 @@
                 <a:ea typeface="Meiryo UI" panose="020B0604030504040204" pitchFamily="50" charset="-128"/>
                 <a:cs typeface="Arial" pitchFamily="34" charset="-120"/>
               </a:rPr>
-              <a:t> の自動化が決め手。</a:t>
+              <a:t> の</a:t>
+            </a:r>
+            <a:r>
+              <a:rPr lang="en-US" sz="5400" b="1" kern="0" spc="-81" dirty="0">
+                <a:solidFill>
+                  <a:srgbClr val="E60013"/>
+                </a:solidFill>
+                <a:latin typeface="Meiryo UI" panose="020B0604030504040204" pitchFamily="50" charset="-128"/>
+                <a:ea typeface="Meiryo UI" panose="020B0604030504040204" pitchFamily="50" charset="-128"/>
+                <a:cs typeface="Arial" pitchFamily="34" charset="-120"/>
+              </a:rPr>
+              <a:t>自動化</a:t>
+            </a:r>
+            <a:r>
+              <a:rPr lang="en-US" sz="5400" b="1" kern="0" spc="-81" dirty="0">
+                <a:solidFill>
+                  <a:srgbClr val="15182A"/>
+                </a:solidFill>
+                <a:latin typeface="Meiryo UI" panose="020B0604030504040204" pitchFamily="50" charset="-128"/>
+                <a:ea typeface="Meiryo UI" panose="020B0604030504040204" pitchFamily="50" charset="-128"/>
+                <a:cs typeface="Arial" pitchFamily="34" charset="-120"/>
+              </a:rPr>
+              <a:t>が決め手。</a:t>
             </a:r>
             <a:endParaRPr lang="en-US" sz="5400" dirty="0">
               <a:latin typeface="Meiryo UI" panose="020B0604030504040204" pitchFamily="50" charset="-128"/>
@@ -13513,7 +13735,7 @@
             </a:avLst>
           </a:prstGeom>
           <a:solidFill>
-            <a:srgbClr val="C00000"/>
+            <a:srgbClr val="E60013"/>
           </a:solidFill>
           <a:ln/>
         </p:spPr>
@@ -15150,7 +15372,7 @@
             </a:avLst>
           </a:prstGeom>
           <a:solidFill>
-            <a:srgbClr val="C00000"/>
+            <a:srgbClr val="E60013"/>
           </a:solidFill>
           <a:ln/>
         </p:spPr>
@@ -18643,7 +18865,7 @@
             </a:avLst>
           </a:prstGeom>
           <a:solidFill>
-            <a:srgbClr val="C00000"/>
+            <a:srgbClr val="E60013"/>
           </a:solidFill>
           <a:ln/>
         </p:spPr>
@@ -19546,6 +19768,163 @@
       </p:grpSpPr>
       <p:sp>
         <p:nvSpPr>
+          <p:cNvPr id="77" name="Shape 36">
+            <a:extLst>
+              <a:ext uri="{FF2B5EF4-FFF2-40B4-BE49-F238E27FC236}">
+                <a16:creationId xmlns:a16="http://schemas.microsoft.com/office/drawing/2014/main" id="{1BC8D57C-9888-0BC8-6005-618F3FFBC68B}"/>
+              </a:ext>
+            </a:extLst>
+          </p:cNvPr>
+          <p:cNvSpPr/>
+          <p:nvPr/>
+        </p:nvSpPr>
+        <p:spPr>
+          <a:xfrm>
+            <a:off x="11637336" y="1210271"/>
+            <a:ext cx="5856946" cy="3281362"/>
+          </a:xfrm>
+          <a:prstGeom prst="rect">
+            <a:avLst/>
+          </a:prstGeom>
+          <a:solidFill>
+            <a:srgbClr val="FFFFFF"/>
+          </a:solidFill>
+          <a:ln/>
+        </p:spPr>
+        <p:txBody>
+          <a:bodyPr>
+            <a:noAutofit/>
+          </a:bodyPr>
+          <a:lstStyle/>
+          <a:p>
+            <a:endParaRPr lang="ja-JP" altLang="en-US">
+              <a:latin typeface="Meiryo UI" panose="020B0604030504040204" pitchFamily="50" charset="-128"/>
+              <a:ea typeface="Meiryo UI" panose="020B0604030504040204" pitchFamily="50" charset="-128"/>
+            </a:endParaRPr>
+          </a:p>
+        </p:txBody>
+      </p:sp>
+      <p:sp>
+        <p:nvSpPr>
+          <p:cNvPr id="72" name="Shape 36">
+            <a:extLst>
+              <a:ext uri="{FF2B5EF4-FFF2-40B4-BE49-F238E27FC236}">
+                <a16:creationId xmlns:a16="http://schemas.microsoft.com/office/drawing/2014/main" id="{E8916F68-77E6-2EDB-FE6E-6B49947D1DA7}"/>
+              </a:ext>
+            </a:extLst>
+          </p:cNvPr>
+          <p:cNvSpPr/>
+          <p:nvPr/>
+        </p:nvSpPr>
+        <p:spPr>
+          <a:xfrm>
+            <a:off x="11826240" y="1819573"/>
+            <a:ext cx="2667000" cy="2464891"/>
+          </a:xfrm>
+          <a:prstGeom prst="rect">
+            <a:avLst/>
+          </a:prstGeom>
+          <a:solidFill>
+            <a:srgbClr val="FFFFFF"/>
+          </a:solidFill>
+          <a:ln>
+            <a:solidFill>
+              <a:schemeClr val="bg1">
+                <a:lumMod val="75000"/>
+              </a:schemeClr>
+            </a:solidFill>
+          </a:ln>
+        </p:spPr>
+        <p:txBody>
+          <a:bodyPr>
+            <a:noAutofit/>
+          </a:bodyPr>
+          <a:lstStyle/>
+          <a:p>
+            <a:endParaRPr lang="ja-JP" altLang="en-US">
+              <a:latin typeface="Meiryo UI" panose="020B0604030504040204" pitchFamily="50" charset="-128"/>
+              <a:ea typeface="Meiryo UI" panose="020B0604030504040204" pitchFamily="50" charset="-128"/>
+            </a:endParaRPr>
+          </a:p>
+        </p:txBody>
+      </p:sp>
+      <p:sp>
+        <p:nvSpPr>
+          <p:cNvPr id="73" name="Shape 36">
+            <a:extLst>
+              <a:ext uri="{FF2B5EF4-FFF2-40B4-BE49-F238E27FC236}">
+                <a16:creationId xmlns:a16="http://schemas.microsoft.com/office/drawing/2014/main" id="{ADA2D452-7CAF-4593-D382-8678AF0F5D08}"/>
+              </a:ext>
+            </a:extLst>
+          </p:cNvPr>
+          <p:cNvSpPr/>
+          <p:nvPr/>
+        </p:nvSpPr>
+        <p:spPr>
+          <a:xfrm>
+            <a:off x="14679311" y="1819573"/>
+            <a:ext cx="2667000" cy="2464891"/>
+          </a:xfrm>
+          <a:prstGeom prst="rect">
+            <a:avLst/>
+          </a:prstGeom>
+          <a:solidFill>
+            <a:srgbClr val="FFFFFF"/>
+          </a:solidFill>
+          <a:ln>
+            <a:solidFill>
+              <a:schemeClr val="bg1">
+                <a:lumMod val="75000"/>
+              </a:schemeClr>
+            </a:solidFill>
+          </a:ln>
+        </p:spPr>
+        <p:txBody>
+          <a:bodyPr>
+            <a:noAutofit/>
+          </a:bodyPr>
+          <a:lstStyle/>
+          <a:p>
+            <a:endParaRPr lang="ja-JP" altLang="en-US">
+              <a:latin typeface="Meiryo UI" panose="020B0604030504040204" pitchFamily="50" charset="-128"/>
+              <a:ea typeface="Meiryo UI" panose="020B0604030504040204" pitchFamily="50" charset="-128"/>
+            </a:endParaRPr>
+          </a:p>
+        </p:txBody>
+      </p:sp>
+      <p:pic>
+        <p:nvPicPr>
+          <p:cNvPr id="75" name="図 74">
+            <a:extLst>
+              <a:ext uri="{FF2B5EF4-FFF2-40B4-BE49-F238E27FC236}">
+                <a16:creationId xmlns:a16="http://schemas.microsoft.com/office/drawing/2014/main" id="{F6304B97-D449-A573-CA50-7D6A7835F55D}"/>
+              </a:ext>
+            </a:extLst>
+          </p:cNvPr>
+          <p:cNvPicPr>
+            <a:picLocks noChangeAspect="1"/>
+          </p:cNvPicPr>
+          <p:nvPr/>
+        </p:nvPicPr>
+        <p:blipFill>
+          <a:blip r:embed="rId3"/>
+          <a:srcRect l="14073" r="13281"/>
+          <a:stretch>
+            <a:fillRect/>
+          </a:stretch>
+        </p:blipFill>
+        <p:spPr>
+          <a:xfrm>
+            <a:off x="12145255" y="2710756"/>
+            <a:ext cx="2196465" cy="1355382"/>
+          </a:xfrm>
+          <a:prstGeom prst="rect">
+            <a:avLst/>
+          </a:prstGeom>
+        </p:spPr>
+      </p:pic>
+      <p:sp>
+        <p:nvSpPr>
           <p:cNvPr id="2" name="Shape 0"/>
           <p:cNvSpPr/>
           <p:nvPr/>
@@ -19785,7 +20164,7 @@
               <a:buNone/>
             </a:pPr>
             <a:r>
-              <a:rPr lang="en-US" sz="1950" dirty="0">
+              <a:rPr lang="en-US" sz="2400" dirty="0">
                 <a:solidFill>
                   <a:srgbClr val="3A3E55"/>
                 </a:solidFill>
@@ -19796,7 +20175,7 @@
               <a:t>JPTロゴから</a:t>
             </a:r>
             <a:r>
-              <a:rPr lang="en-US" sz="1950" b="1" dirty="0">
+              <a:rPr lang="en-US" sz="2400" b="1" dirty="0">
                 <a:solidFill>
                   <a:srgbClr val="0064A0"/>
                 </a:solidFill>
@@ -19807,7 +20186,7 @@
               <a:t>cyan→blue→indigo</a:t>
             </a:r>
             <a:r>
-              <a:rPr lang="en-US" sz="1950" dirty="0">
+              <a:rPr lang="en-US" sz="2400" dirty="0">
                 <a:solidFill>
                   <a:srgbClr val="3A3E55"/>
                 </a:solidFill>
@@ -19818,7 +20197,7 @@
               <a:t>のグラデーションと</a:t>
             </a:r>
             <a:r>
-              <a:rPr lang="en-US" sz="1950" b="1" dirty="0">
+              <a:rPr lang="en-US" sz="2400" b="1" dirty="0">
                 <a:solidFill>
                   <a:srgbClr val="C6862A"/>
                 </a:solidFill>
@@ -19829,7 +20208,7 @@
               <a:t>amber </a:t>
             </a:r>
             <a:r>
-              <a:rPr lang="en-US" sz="1950" dirty="0">
+              <a:rPr lang="en-US" sz="2400" dirty="0" err="1">
                 <a:solidFill>
                   <a:srgbClr val="3A3E55"/>
                 </a:solidFill>
@@ -19837,10 +20216,53 @@
                 <a:ea typeface="Meiryo UI" panose="020B0604030504040204" pitchFamily="50" charset="-128"/>
                 <a:cs typeface="Arial" pitchFamily="34" charset="-120"/>
               </a:rPr>
-              <a:t>を抽出。CTA・最重要アクションだけに </a:t>
-            </a:r>
-            <a:r>
-              <a:rPr lang="en-US" sz="1950" b="1" dirty="0">
+              <a:t>を抽出</a:t>
+            </a:r>
+            <a:r>
+              <a:rPr lang="en-US" sz="2400" dirty="0">
+                <a:solidFill>
+                  <a:srgbClr val="3A3E55"/>
+                </a:solidFill>
+                <a:latin typeface="Meiryo UI" panose="020B0604030504040204" pitchFamily="50" charset="-128"/>
+                <a:ea typeface="Meiryo UI" panose="020B0604030504040204" pitchFamily="50" charset="-128"/>
+                <a:cs typeface="Arial" pitchFamily="34" charset="-120"/>
+              </a:rPr>
+              <a:t>。</a:t>
+            </a:r>
+            <a:br>
+              <a:rPr lang="en-US" sz="2400" dirty="0">
+                <a:solidFill>
+                  <a:srgbClr val="3A3E55"/>
+                </a:solidFill>
+                <a:latin typeface="Meiryo UI" panose="020B0604030504040204" pitchFamily="50" charset="-128"/>
+                <a:ea typeface="Meiryo UI" panose="020B0604030504040204" pitchFamily="50" charset="-128"/>
+                <a:cs typeface="Arial" pitchFamily="34" charset="-120"/>
+              </a:rPr>
+            </a:br>
+            <a:r>
+              <a:rPr lang="en-US" sz="2400" dirty="0" err="1">
+                <a:solidFill>
+                  <a:srgbClr val="3A3E55"/>
+                </a:solidFill>
+                <a:latin typeface="Meiryo UI" panose="020B0604030504040204" pitchFamily="50" charset="-128"/>
+                <a:ea typeface="Meiryo UI" panose="020B0604030504040204" pitchFamily="50" charset="-128"/>
+                <a:cs typeface="Arial" pitchFamily="34" charset="-120"/>
+              </a:rPr>
+              <a:t>CTA・最重要アクションだけに</a:t>
+            </a:r>
+            <a:r>
+              <a:rPr lang="en-US" sz="2400" dirty="0">
+                <a:solidFill>
+                  <a:srgbClr val="3A3E55"/>
+                </a:solidFill>
+                <a:latin typeface="Meiryo UI" panose="020B0604030504040204" pitchFamily="50" charset="-128"/>
+                <a:ea typeface="Meiryo UI" panose="020B0604030504040204" pitchFamily="50" charset="-128"/>
+                <a:cs typeface="Arial" pitchFamily="34" charset="-120"/>
+              </a:rPr>
+              <a:t> </a:t>
+            </a:r>
+            <a:r>
+              <a:rPr lang="en-US" sz="2400" b="1" dirty="0">
                 <a:solidFill>
                   <a:srgbClr val="E60013"/>
                 </a:solidFill>
@@ -19848,10 +20270,32 @@
                 <a:ea typeface="Meiryo UI" panose="020B0604030504040204" pitchFamily="50" charset="-128"/>
                 <a:cs typeface="Arial" pitchFamily="34" charset="-120"/>
               </a:rPr>
-              <a:t>red #E60013</a:t>
-            </a:r>
-            <a:r>
-              <a:rPr lang="en-US" sz="1950" dirty="0">
+              <a:t>red</a:t>
+            </a:r>
+            <a:r>
+              <a:rPr lang="ja-JP" altLang="en-US" sz="2400" b="1" dirty="0">
+                <a:solidFill>
+                  <a:srgbClr val="E60013"/>
+                </a:solidFill>
+                <a:latin typeface="Meiryo UI" panose="020B0604030504040204" pitchFamily="50" charset="-128"/>
+                <a:ea typeface="Meiryo UI" panose="020B0604030504040204" pitchFamily="50" charset="-128"/>
+                <a:cs typeface="Arial" pitchFamily="34" charset="-120"/>
+              </a:rPr>
+              <a:t>あ</a:t>
+            </a:r>
+            <a:r>
+              <a:rPr lang="en-US" sz="2400" b="1" dirty="0">
+                <a:solidFill>
+                  <a:srgbClr val="E60013"/>
+                </a:solidFill>
+                <a:latin typeface="Meiryo UI" panose="020B0604030504040204" pitchFamily="50" charset="-128"/>
+                <a:ea typeface="Meiryo UI" panose="020B0604030504040204" pitchFamily="50" charset="-128"/>
+                <a:cs typeface="Arial" pitchFamily="34" charset="-120"/>
+              </a:rPr>
+              <a:t> #E60013</a:t>
+            </a:r>
+            <a:r>
+              <a:rPr lang="en-US" sz="2400" dirty="0">
                 <a:solidFill>
                   <a:srgbClr val="3A3E55"/>
                 </a:solidFill>
@@ -19861,7 +20305,7 @@
               </a:rPr>
               <a:t>を割り当てる。</a:t>
             </a:r>
-            <a:endParaRPr lang="en-US" sz="1950" dirty="0">
+            <a:endParaRPr lang="en-US" sz="2400" dirty="0">
               <a:latin typeface="Meiryo UI" panose="020B0604030504040204" pitchFamily="50" charset="-128"/>
               <a:ea typeface="Meiryo UI" panose="020B0604030504040204" pitchFamily="50" charset="-128"/>
             </a:endParaRPr>
@@ -19877,15 +20321,15 @@
           <p:nvPr/>
         </p:nvPicPr>
         <p:blipFill>
-          <a:blip r:embed="rId3"/>
+          <a:blip r:embed="rId4"/>
           <a:stretch>
             <a:fillRect/>
           </a:stretch>
         </p:blipFill>
         <p:spPr>
           <a:xfrm>
-            <a:off x="16415004" y="2251847"/>
-            <a:ext cx="1333500" cy="1333500"/>
+            <a:off x="15168639" y="2786956"/>
+            <a:ext cx="1390352" cy="1390352"/>
           </a:xfrm>
           <a:prstGeom prst="rect">
             <a:avLst/>
@@ -22335,7 +22779,7 @@
             </a:avLst>
           </a:prstGeom>
           <a:solidFill>
-            <a:srgbClr val="C00000"/>
+            <a:srgbClr val="E5A330"/>
           </a:solidFill>
           <a:ln/>
         </p:spPr>
@@ -22352,7 +22796,15 @@
                   <a:schemeClr val="bg1"/>
                 </a:solidFill>
               </a:rPr>
-              <a:t>Appendix</a:t>
+              <a:t>Appendix </a:t>
+            </a:r>
+            <a:r>
+              <a:rPr lang="ja-JP" altLang="en-US" sz="2400" dirty="0">
+                <a:solidFill>
+                  <a:schemeClr val="bg1"/>
+                </a:solidFill>
+              </a:rPr>
+              <a:t>附録</a:t>
             </a:r>
             <a:endParaRPr lang="en-US" sz="2400" b="1" dirty="0">
               <a:solidFill>
@@ -22361,6 +22813,178 @@
               <a:latin typeface="Meiryo UI" panose="020B0604030504040204" pitchFamily="50" charset="-128"/>
               <a:ea typeface="Meiryo UI" panose="020B0604030504040204" pitchFamily="50" charset="-128"/>
             </a:endParaRPr>
+          </a:p>
+        </p:txBody>
+      </p:sp>
+      <p:sp>
+        <p:nvSpPr>
+          <p:cNvPr id="4" name="Text 16">
+            <a:extLst>
+              <a:ext uri="{FF2B5EF4-FFF2-40B4-BE49-F238E27FC236}">
+                <a16:creationId xmlns:a16="http://schemas.microsoft.com/office/drawing/2014/main" id="{D7DC3961-5E1A-0AC9-B87A-8264212F4838}"/>
+              </a:ext>
+            </a:extLst>
+          </p:cNvPr>
+          <p:cNvSpPr/>
+          <p:nvPr/>
+        </p:nvSpPr>
+        <p:spPr>
+          <a:xfrm>
+            <a:off x="12046315" y="1886396"/>
+            <a:ext cx="2394347" cy="369987"/>
+          </a:xfrm>
+          <a:prstGeom prst="rect">
+            <a:avLst/>
+          </a:prstGeom>
+          <a:noFill/>
+          <a:ln/>
+        </p:spPr>
+        <p:txBody>
+          <a:bodyPr wrap="square" lIns="25400" tIns="25400" rIns="25400" bIns="25400" rtlCol="0" anchor="t">
+            <a:noAutofit/>
+          </a:bodyPr>
+          <a:lstStyle/>
+          <a:p>
+            <a:pPr marL="0" indent="0" algn="l">
+              <a:lnSpc>
+                <a:spcPct val="150000"/>
+              </a:lnSpc>
+              <a:buNone/>
+            </a:pPr>
+            <a:r>
+              <a:rPr lang="ja-JP" altLang="en-US" b="1" kern="0" spc="176" dirty="0">
+                <a:latin typeface="Meiryo UI" panose="020B0604030504040204" pitchFamily="50" charset="-128"/>
+                <a:ea typeface="Meiryo UI" panose="020B0604030504040204" pitchFamily="50" charset="-128"/>
+                <a:cs typeface="Courier New" pitchFamily="34" charset="-120"/>
+              </a:rPr>
+              <a:t>日揮ホールディングス</a:t>
+            </a:r>
+            <a:r>
+              <a:rPr lang="en-US" altLang="ja-JP" b="1" kern="0" spc="176" dirty="0">
+                <a:latin typeface="Meiryo UI" panose="020B0604030504040204" pitchFamily="50" charset="-128"/>
+                <a:ea typeface="Meiryo UI" panose="020B0604030504040204" pitchFamily="50" charset="-128"/>
+                <a:cs typeface="Courier New" pitchFamily="34" charset="-120"/>
+              </a:rPr>
+              <a:t>HP</a:t>
+            </a:r>
+            <a:r>
+              <a:rPr lang="ja-JP" altLang="en-US" b="1" kern="0" spc="176" dirty="0">
+                <a:latin typeface="Meiryo UI" panose="020B0604030504040204" pitchFamily="50" charset="-128"/>
+                <a:ea typeface="Meiryo UI" panose="020B0604030504040204" pitchFamily="50" charset="-128"/>
+                <a:cs typeface="Courier New" pitchFamily="34" charset="-120"/>
+              </a:rPr>
+              <a:t>より</a:t>
+            </a:r>
+            <a:endParaRPr lang="en-US" b="1" dirty="0">
+              <a:latin typeface="Meiryo UI" panose="020B0604030504040204" pitchFamily="50" charset="-128"/>
+              <a:ea typeface="Meiryo UI" panose="020B0604030504040204" pitchFamily="50" charset="-128"/>
+            </a:endParaRPr>
+          </a:p>
+        </p:txBody>
+      </p:sp>
+      <p:sp>
+        <p:nvSpPr>
+          <p:cNvPr id="76" name="Text 16">
+            <a:extLst>
+              <a:ext uri="{FF2B5EF4-FFF2-40B4-BE49-F238E27FC236}">
+                <a16:creationId xmlns:a16="http://schemas.microsoft.com/office/drawing/2014/main" id="{2F7B0E80-CEA0-CED4-A0C6-8AC772ED887E}"/>
+              </a:ext>
+            </a:extLst>
+          </p:cNvPr>
+          <p:cNvSpPr/>
+          <p:nvPr/>
+        </p:nvSpPr>
+        <p:spPr>
+          <a:xfrm>
+            <a:off x="14815637" y="1886396"/>
+            <a:ext cx="2394347" cy="369987"/>
+          </a:xfrm>
+          <a:prstGeom prst="rect">
+            <a:avLst/>
+          </a:prstGeom>
+          <a:noFill/>
+          <a:ln/>
+        </p:spPr>
+        <p:txBody>
+          <a:bodyPr wrap="square" lIns="25400" tIns="25400" rIns="25400" bIns="25400" rtlCol="0" anchor="t">
+            <a:noAutofit/>
+          </a:bodyPr>
+          <a:lstStyle/>
+          <a:p>
+            <a:pPr marL="0" indent="0" algn="l">
+              <a:lnSpc>
+                <a:spcPct val="150000"/>
+              </a:lnSpc>
+              <a:buNone/>
+            </a:pPr>
+            <a:r>
+              <a:rPr lang="ja-JP" altLang="en-US" b="1" kern="0" spc="176" dirty="0">
+                <a:latin typeface="Meiryo UI" panose="020B0604030504040204" pitchFamily="50" charset="-128"/>
+                <a:ea typeface="Meiryo UI" panose="020B0604030504040204" pitchFamily="50" charset="-128"/>
+                <a:cs typeface="Courier New" pitchFamily="34" charset="-120"/>
+              </a:rPr>
+              <a:t>日揮パラレルテクノロジーズ　</a:t>
+            </a:r>
+            <a:r>
+              <a:rPr lang="en-US" altLang="ja-JP" b="1" kern="0" spc="176" dirty="0">
+                <a:latin typeface="Meiryo UI" panose="020B0604030504040204" pitchFamily="50" charset="-128"/>
+                <a:ea typeface="Meiryo UI" panose="020B0604030504040204" pitchFamily="50" charset="-128"/>
+                <a:cs typeface="Courier New" pitchFamily="34" charset="-120"/>
+              </a:rPr>
+              <a:t>HP</a:t>
+            </a:r>
+            <a:r>
+              <a:rPr lang="ja-JP" altLang="en-US" b="1" kern="0" spc="176" dirty="0">
+                <a:latin typeface="Meiryo UI" panose="020B0604030504040204" pitchFamily="50" charset="-128"/>
+                <a:ea typeface="Meiryo UI" panose="020B0604030504040204" pitchFamily="50" charset="-128"/>
+                <a:cs typeface="Courier New" pitchFamily="34" charset="-120"/>
+              </a:rPr>
+              <a:t>より</a:t>
+            </a:r>
+            <a:endParaRPr lang="en-US" b="1" dirty="0">
+              <a:latin typeface="Meiryo UI" panose="020B0604030504040204" pitchFamily="50" charset="-128"/>
+              <a:ea typeface="Meiryo UI" panose="020B0604030504040204" pitchFamily="50" charset="-128"/>
+            </a:endParaRPr>
+          </a:p>
+        </p:txBody>
+      </p:sp>
+      <p:sp>
+        <p:nvSpPr>
+          <p:cNvPr id="78" name="Text 6">
+            <a:extLst>
+              <a:ext uri="{FF2B5EF4-FFF2-40B4-BE49-F238E27FC236}">
+                <a16:creationId xmlns:a16="http://schemas.microsoft.com/office/drawing/2014/main" id="{0A58E751-D028-0667-128A-CEEEDE4E7638}"/>
+              </a:ext>
+            </a:extLst>
+          </p:cNvPr>
+          <p:cNvSpPr/>
+          <p:nvPr/>
+        </p:nvSpPr>
+        <p:spPr>
+          <a:xfrm>
+            <a:off x="11910243" y="1276946"/>
+            <a:ext cx="3531870" cy="342900"/>
+          </a:xfrm>
+          <a:prstGeom prst="rect">
+            <a:avLst/>
+          </a:prstGeom>
+          <a:noFill/>
+          <a:ln/>
+        </p:spPr>
+        <p:txBody>
+          <a:bodyPr wrap="square" lIns="25400" tIns="25400" rIns="25400" bIns="25400" rtlCol="0" anchor="t">
+            <a:noAutofit/>
+          </a:bodyPr>
+          <a:lstStyle/>
+          <a:p>
+            <a:pPr marL="0" indent="0" algn="l">
+              <a:buNone/>
+            </a:pPr>
+            <a:r>
+              <a:rPr lang="ja-JP" altLang="en-US" sz="2000" b="1" dirty="0"/>
+              <a:t>参考</a:t>
+            </a:r>
+            <a:endParaRPr lang="en-US" sz="2000" b="1" dirty="0"/>
           </a:p>
         </p:txBody>
       </p:sp>
@@ -22489,7 +23113,7 @@
             </a:avLst>
           </a:prstGeom>
           <a:solidFill>
-            <a:srgbClr val="E5A330"/>
+            <a:srgbClr val="E60013"/>
           </a:solidFill>
           <a:ln/>
         </p:spPr>
@@ -29367,9 +29991,23 @@
                 <a:ea typeface="Meiryo UI" panose="020B0604030504040204" pitchFamily="50" charset="-128"/>
                 <a:cs typeface="Arial" pitchFamily="34" charset="-120"/>
               </a:rPr>
-              <a:t>課題理解と仮説</a:t>
+              <a:t>課題理解と</a:t>
+            </a:r>
+            <a:r>
+              <a:rPr lang="ja-JP" altLang="en-US" sz="5400" b="1" kern="0" spc="-81" dirty="0">
+                <a:solidFill>
+                  <a:srgbClr val="E60013"/>
+                </a:solidFill>
+                <a:latin typeface="Meiryo UI" panose="020B0604030504040204" pitchFamily="50" charset="-128"/>
+                <a:ea typeface="Meiryo UI" panose="020B0604030504040204" pitchFamily="50" charset="-128"/>
+                <a:cs typeface="Arial" pitchFamily="34" charset="-120"/>
+              </a:rPr>
+              <a:t>仮説</a:t>
             </a:r>
             <a:endParaRPr lang="en-US" sz="5400" dirty="0">
+              <a:solidFill>
+                <a:srgbClr val="E60013"/>
+              </a:solidFill>
               <a:latin typeface="Meiryo UI" panose="020B0604030504040204" pitchFamily="50" charset="-128"/>
               <a:ea typeface="Meiryo UI" panose="020B0604030504040204" pitchFamily="50" charset="-128"/>
             </a:endParaRPr>
@@ -29559,13 +30197,24 @@
             <a:r>
               <a:rPr lang="en-US" sz="5400" b="1" kern="0" spc="-81" dirty="0">
                 <a:solidFill>
+                  <a:srgbClr val="E60013"/>
+                </a:solidFill>
+                <a:latin typeface="Meiryo UI" panose="020B0604030504040204" pitchFamily="50" charset="-128"/>
+                <a:ea typeface="Meiryo UI" panose="020B0604030504040204" pitchFamily="50" charset="-128"/>
+                <a:cs typeface="Arial" pitchFamily="34" charset="-120"/>
+              </a:rPr>
+              <a:t>設計優先</a:t>
+            </a:r>
+            <a:r>
+              <a:rPr lang="en-US" sz="5400" b="1" kern="0" spc="-81" dirty="0">
+                <a:solidFill>
                   <a:srgbClr val="15182A"/>
                 </a:solidFill>
                 <a:latin typeface="Meiryo UI" panose="020B0604030504040204" pitchFamily="50" charset="-128"/>
                 <a:ea typeface="Meiryo UI" panose="020B0604030504040204" pitchFamily="50" charset="-128"/>
                 <a:cs typeface="Arial" pitchFamily="34" charset="-120"/>
               </a:rPr>
-              <a:t>設計優先で、 </a:t>
+              <a:t>で、 </a:t>
             </a:r>
             <a:r>
               <a:rPr lang="en-US" sz="5400" b="1" kern="0" spc="-81" dirty="0" err="1">
@@ -31263,7 +31912,7 @@
             </a:avLst>
           </a:prstGeom>
           <a:solidFill>
-            <a:srgbClr val="C00000"/>
+            <a:srgbClr val="E60013"/>
           </a:solidFill>
           <a:ln/>
         </p:spPr>
@@ -31725,7 +32374,7 @@
         </p:nvSpPr>
         <p:spPr>
           <a:xfrm>
-            <a:off x="1014080" y="1244798"/>
+            <a:off x="985411" y="1975543"/>
             <a:ext cx="16130954" cy="1478161"/>
           </a:xfrm>
           <a:prstGeom prst="rect">
@@ -34062,7 +34711,7 @@
             </a:avLst>
           </a:prstGeom>
           <a:solidFill>
-            <a:srgbClr val="C00000"/>
+            <a:srgbClr val="E60013"/>
           </a:solidFill>
           <a:ln/>
         </p:spPr>
@@ -34109,7 +34758,7 @@
         </p:nvSpPr>
         <p:spPr>
           <a:xfrm>
-            <a:off x="932717" y="2638338"/>
+            <a:off x="1102995" y="1143893"/>
             <a:ext cx="9509760" cy="502920"/>
           </a:xfrm>
           <a:prstGeom prst="rect">
@@ -34125,7 +34774,7 @@
           <a:lstStyle/>
           <a:p>
             <a:r>
-              <a:rPr lang="en-US" altLang="ja-JP" sz="2400" b="1" dirty="0" err="1">
+              <a:rPr lang="en-US" altLang="ja-JP" sz="3200" b="1" dirty="0" err="1">
                 <a:solidFill>
                   <a:srgbClr val="212429"/>
                 </a:solidFill>
@@ -34135,7 +34784,7 @@
               </a:rPr>
               <a:t>AI協働の役割分担</a:t>
             </a:r>
-            <a:endParaRPr lang="en-US" altLang="ja-JP" sz="2400" dirty="0">
+            <a:endParaRPr lang="en-US" altLang="ja-JP" sz="3200" dirty="0">
               <a:latin typeface="Meiryo UI" panose="020B0604030504040204" pitchFamily="50" charset="-128"/>
               <a:ea typeface="Meiryo UI" panose="020B0604030504040204" pitchFamily="50" charset="-128"/>
             </a:endParaRPr>
@@ -36481,7 +37130,7 @@
             </a:avLst>
           </a:prstGeom>
           <a:solidFill>
-            <a:srgbClr val="C00000"/>
+            <a:srgbClr val="E60013"/>
           </a:solidFill>
           <a:ln/>
         </p:spPr>
